--- a/ゲーム科1年/00_前期/ゲームプログラミングⅢ/ゲーム数学/実習/07_ホーミング.pptx
+++ b/ゲーム科1年/00_前期/ゲームプログラミングⅢ/ゲーム数学/実習/07_ホーミング.pptx
@@ -264,7 +264,7 @@
           <a:p>
             <a:fld id="{E9CC885B-4903-4D54-9A93-00025F12DED9}" type="datetimeFigureOut">
               <a:rPr kumimoji="1" lang="ja-JP" altLang="en-US" smtClean="0"/>
-              <a:t>2024/12/4</a:t>
+              <a:t>2026/2/20</a:t>
             </a:fld>
             <a:endParaRPr kumimoji="1" lang="ja-JP" altLang="en-US"/>
           </a:p>
@@ -494,7 +494,7 @@
           <a:p>
             <a:fld id="{E9CC885B-4903-4D54-9A93-00025F12DED9}" type="datetimeFigureOut">
               <a:rPr kumimoji="1" lang="ja-JP" altLang="en-US" smtClean="0"/>
-              <a:t>2024/12/4</a:t>
+              <a:t>2026/2/20</a:t>
             </a:fld>
             <a:endParaRPr kumimoji="1" lang="ja-JP" altLang="en-US"/>
           </a:p>
@@ -734,7 +734,7 @@
           <a:p>
             <a:fld id="{E9CC885B-4903-4D54-9A93-00025F12DED9}" type="datetimeFigureOut">
               <a:rPr kumimoji="1" lang="ja-JP" altLang="en-US" smtClean="0"/>
-              <a:t>2024/12/4</a:t>
+              <a:t>2026/2/20</a:t>
             </a:fld>
             <a:endParaRPr kumimoji="1" lang="ja-JP" altLang="en-US"/>
           </a:p>
@@ -964,7 +964,7 @@
           <a:p>
             <a:fld id="{E9CC885B-4903-4D54-9A93-00025F12DED9}" type="datetimeFigureOut">
               <a:rPr kumimoji="1" lang="ja-JP" altLang="en-US" smtClean="0"/>
-              <a:t>2024/12/4</a:t>
+              <a:t>2026/2/20</a:t>
             </a:fld>
             <a:endParaRPr kumimoji="1" lang="ja-JP" altLang="en-US"/>
           </a:p>
@@ -1239,7 +1239,7 @@
           <a:p>
             <a:fld id="{E9CC885B-4903-4D54-9A93-00025F12DED9}" type="datetimeFigureOut">
               <a:rPr kumimoji="1" lang="ja-JP" altLang="en-US" smtClean="0"/>
-              <a:t>2024/12/4</a:t>
+              <a:t>2026/2/20</a:t>
             </a:fld>
             <a:endParaRPr kumimoji="1" lang="ja-JP" altLang="en-US"/>
           </a:p>
@@ -1568,7 +1568,7 @@
           <a:p>
             <a:fld id="{E9CC885B-4903-4D54-9A93-00025F12DED9}" type="datetimeFigureOut">
               <a:rPr kumimoji="1" lang="ja-JP" altLang="en-US" smtClean="0"/>
-              <a:t>2024/12/4</a:t>
+              <a:t>2026/2/20</a:t>
             </a:fld>
             <a:endParaRPr kumimoji="1" lang="ja-JP" altLang="en-US"/>
           </a:p>
@@ -2044,7 +2044,7 @@
           <a:p>
             <a:fld id="{E9CC885B-4903-4D54-9A93-00025F12DED9}" type="datetimeFigureOut">
               <a:rPr kumimoji="1" lang="ja-JP" altLang="en-US" smtClean="0"/>
-              <a:t>2024/12/4</a:t>
+              <a:t>2026/2/20</a:t>
             </a:fld>
             <a:endParaRPr kumimoji="1" lang="ja-JP" altLang="en-US"/>
           </a:p>
@@ -2185,7 +2185,7 @@
           <a:p>
             <a:fld id="{E9CC885B-4903-4D54-9A93-00025F12DED9}" type="datetimeFigureOut">
               <a:rPr kumimoji="1" lang="ja-JP" altLang="en-US" smtClean="0"/>
-              <a:t>2024/12/4</a:t>
+              <a:t>2026/2/20</a:t>
             </a:fld>
             <a:endParaRPr kumimoji="1" lang="ja-JP" altLang="en-US"/>
           </a:p>
@@ -2298,7 +2298,7 @@
           <a:p>
             <a:fld id="{E9CC885B-4903-4D54-9A93-00025F12DED9}" type="datetimeFigureOut">
               <a:rPr kumimoji="1" lang="ja-JP" altLang="en-US" smtClean="0"/>
-              <a:t>2024/12/4</a:t>
+              <a:t>2026/2/20</a:t>
             </a:fld>
             <a:endParaRPr kumimoji="1" lang="ja-JP" altLang="en-US"/>
           </a:p>
@@ -2641,7 +2641,7 @@
           <a:p>
             <a:fld id="{E9CC885B-4903-4D54-9A93-00025F12DED9}" type="datetimeFigureOut">
               <a:rPr kumimoji="1" lang="ja-JP" altLang="en-US" smtClean="0"/>
-              <a:t>2024/12/4</a:t>
+              <a:t>2026/2/20</a:t>
             </a:fld>
             <a:endParaRPr kumimoji="1" lang="ja-JP" altLang="en-US"/>
           </a:p>
@@ -2929,7 +2929,7 @@
           <a:p>
             <a:fld id="{E9CC885B-4903-4D54-9A93-00025F12DED9}" type="datetimeFigureOut">
               <a:rPr kumimoji="1" lang="ja-JP" altLang="en-US" smtClean="0"/>
-              <a:t>2024/12/4</a:t>
+              <a:t>2026/2/20</a:t>
             </a:fld>
             <a:endParaRPr kumimoji="1" lang="ja-JP" altLang="en-US"/>
           </a:p>
@@ -3202,7 +3202,7 @@
           <a:p>
             <a:fld id="{E9CC885B-4903-4D54-9A93-00025F12DED9}" type="datetimeFigureOut">
               <a:rPr kumimoji="1" lang="ja-JP" altLang="en-US" smtClean="0"/>
-              <a:t>2024/12/4</a:t>
+              <a:t>2026/2/20</a:t>
             </a:fld>
             <a:endParaRPr kumimoji="1" lang="ja-JP" altLang="en-US"/>
           </a:p>
